--- a/slides/fukuoka-ems-2035-slides.pptx
+++ b/slides/fukuoka-ems-2035-slides.pptx
@@ -4511,13 +4511,13 @@
                 <c:formatCode>General</c:formatCode>
                 <c:ptCount val="3"/>
                 <c:pt idx="0">
-                  <c:v>5.9</c:v>
+                  <c:v>59.5</c:v>
                 </c:pt>
                 <c:pt idx="1">
-                  <c:v>12</c:v>
+                  <c:v>120.1</c:v>
                 </c:pt>
                 <c:pt idx="2">
-                  <c:v>24.9</c:v>
+                  <c:v>248.8</c:v>
                 </c:pt>
               </c:numCache>
             </c:numRef>
@@ -4532,7 +4532,7 @@
               <c:strCache>
                 <c:ptCount val="1"/>
                 <c:pt idx="0">
-                  <c:v>横浜</c:v>
+                  <c:v>福岡</c:v>
                 </c:pt>
               </c:strCache>
             </c:strRef>
@@ -4594,13 +4594,13 @@
                 <c:formatCode>General</c:formatCode>
                 <c:ptCount val="3"/>
                 <c:pt idx="0">
-                  <c:v>6.3</c:v>
+                  <c:v>70.7</c:v>
                 </c:pt>
                 <c:pt idx="1">
-                  <c:v>12.3</c:v>
+                  <c:v>142.8</c:v>
                 </c:pt>
                 <c:pt idx="2">
-                  <c:v>24.8</c:v>
+                  <c:v>295.9</c:v>
                 </c:pt>
               </c:numCache>
             </c:numRef>
@@ -4681,7 +4681,7 @@
         <c:axId val="2094734552"/>
         <c:scaling>
           <c:orientation val="minMax"/>
-          <c:max val="30"/>
+          <c:max val="320"/>
           <c:min val="0"/>
         </c:scaling>
         <c:delete val="0"/>
@@ -4718,7 +4718,7 @@
                     </a:solidFill>
                     <a:latin typeface="Hiragino Sans"/>
                   </a:rPr>
-                  <a:t>人口100人あたり/年（搬送人員）</a:t>
+                  <a:t>人口1,000人あたり/年（搬送人員）</a:t>
                 </a:r>
               </a:p>
             </c:rich>
@@ -6411,7 +6411,7 @@
           <a:p>
             <a:r>
               <a:rPr lang="en-US" dirty="0"/>
-              <a:t>全国と横浜市でも、年齢が上がるほど運ばれる割合が高くなる形は同じです。ただし水準そのものは地域で違い、福岡の65歳以上は全国より約15%高く出ています。そこで、形は他の都市の知見を借り、水準は福岡の実測値に合わせました。</a:t>
+              <a:t>全国と福岡のどちらでも、年齢が上がるほど運ばれる割合が高くなる形は同じです。ただし水準そのものは地域で違い、福岡の65歳以上は全国より約15%高く出ています。そこで、形は全国の知見を借り、水準は福岡の実測値に合わせました。</a:t>
             </a:r>
             <a:endParaRPr lang="en-US" dirty="0"/>
           </a:p>
@@ -11501,7 +11501,7 @@
                 <a:ea typeface="Hiragino Sans" pitchFamily="34" charset="-122"/>
                 <a:cs typeface="Hiragino Sans" pitchFamily="34" charset="-120"/>
               </a:rPr>
-              <a:t>通勤・通学者が区内にいる時間（8.5時間/24時間）。横浜版と同じ</a:t>
+              <a:t>通勤・通学者が区内にいる時間（約8.5時間÷24時間）から置いた係数</a:t>
             </a:r>
             <a:endParaRPr lang="en-US" sz="1600" dirty="0"/>
           </a:p>
@@ -12271,7 +12271,7 @@
                 <a:ea typeface="Hiragino Sans" pitchFamily="34" charset="-122"/>
                 <a:cs typeface="Hiragino Sans" pitchFamily="34" charset="-120"/>
               </a:rPr>
-              <a:t>妥当性② 他の都市と比べても同じ形</a:t>
+              <a:t>妥当性② 全国と比べても同じ形</a:t>
             </a:r>
             <a:endParaRPr lang="en-US" sz="3200" dirty="0"/>
           </a:p>
@@ -12310,7 +12310,7 @@
                 <a:ea typeface="Hiragino Sans" pitchFamily="34" charset="-122"/>
                 <a:cs typeface="Hiragino Sans" pitchFamily="34" charset="-120"/>
               </a:rPr>
-              <a:t>出典：消防庁 令和7年版、横浜市消防年報 R6</a:t>
+              <a:t>出典：消防庁 令和7年版、福岡市消防年報 R6</a:t>
             </a:r>
             <a:endParaRPr lang="en-US" sz="1000" dirty="0"/>
           </a:p>
@@ -16890,7 +16890,7 @@
                 <a:ea typeface="Hiragino Sans" pitchFamily="34" charset="-122"/>
                 <a:cs typeface="Hiragino Sans" pitchFamily="34" charset="-120"/>
               </a:rPr>
-              <a:t>出典：福岡市消防年報 R6、消防力の整備指針 第13条（横浜市の算定例）</a:t>
+              <a:t>出典：福岡市消防年報 R6、消防力の整備指針 第13条</a:t>
             </a:r>
             <a:endParaRPr lang="en-US" sz="1000" dirty="0"/>
           </a:p>
